--- a/templates/static/content/three_column_red_business.pptx
+++ b/templates/static/content/three_column_red_business.pptx
@@ -3206,6 +3206,843 @@
           <a:lstStyle/>
           <a:p>
             <a:pPr algn="ctr"/>
+          </a:p>
+        </p:txBody>
+      </p:sp>
+      <p:sp>
+        <p:nvSpPr>
+          <p:cNvPr id="5" name="Rounded Rectangle 4"/>
+          <p:cNvSpPr/>
+          <p:nvPr/>
+        </p:nvSpPr>
+        <p:spPr>
+          <a:xfrm>
+            <a:off x="548640" y="1463040"/>
+            <a:ext cx="2377440" cy="4389120"/>
+          </a:xfrm>
+          <a:prstGeom prst="roundRect">
+            <a:avLst/>
+          </a:prstGeom>
+          <a:solidFill>
+            <a:srgbClr val="FFFFFF"/>
+          </a:solidFill>
+          <a:ln w="12700">
+            <a:solidFill>
+              <a:srgbClr val="E0E0E0"/>
+            </a:solidFill>
+          </a:ln>
+        </p:spPr>
+        <p:style>
+          <a:lnRef idx="1">
+            <a:schemeClr val="accent1"/>
+          </a:lnRef>
+          <a:fillRef idx="3">
+            <a:schemeClr val="accent1"/>
+          </a:fillRef>
+          <a:effectRef idx="2">
+            <a:schemeClr val="accent1"/>
+          </a:effectRef>
+          <a:fontRef idx="minor">
+            <a:schemeClr val="lt1"/>
+          </a:fontRef>
+        </p:style>
+        <p:txBody>
+          <a:bodyPr rtlCol="0" anchor="ctr"/>
+          <a:lstStyle/>
+          <a:p>
+            <a:pPr algn="ctr"/>
+          </a:p>
+        </p:txBody>
+      </p:sp>
+      <p:sp>
+        <p:nvSpPr>
+          <p:cNvPr id="6" name="Rectangle 5"/>
+          <p:cNvSpPr/>
+          <p:nvPr/>
+        </p:nvSpPr>
+        <p:spPr>
+          <a:xfrm>
+            <a:off x="548640" y="1463040"/>
+            <a:ext cx="2377440" cy="54864"/>
+          </a:xfrm>
+          <a:prstGeom prst="rect">
+            <a:avLst/>
+          </a:prstGeom>
+          <a:solidFill>
+            <a:srgbClr val="1976D2"/>
+          </a:solidFill>
+          <a:ln>
+            <a:noFill/>
+          </a:ln>
+        </p:spPr>
+        <p:style>
+          <a:lnRef idx="1">
+            <a:schemeClr val="accent1"/>
+          </a:lnRef>
+          <a:fillRef idx="3">
+            <a:schemeClr val="accent1"/>
+          </a:fillRef>
+          <a:effectRef idx="2">
+            <a:schemeClr val="accent1"/>
+          </a:effectRef>
+          <a:fontRef idx="minor">
+            <a:schemeClr val="lt1"/>
+          </a:fontRef>
+        </p:style>
+        <p:txBody>
+          <a:bodyPr rtlCol="0" anchor="ctr"/>
+          <a:lstStyle/>
+          <a:p>
+            <a:pPr algn="ctr"/>
+          </a:p>
+        </p:txBody>
+      </p:sp>
+      <p:sp>
+        <p:nvSpPr>
+          <p:cNvPr id="7" name="Oval 6"/>
+          <p:cNvSpPr/>
+          <p:nvPr/>
+        </p:nvSpPr>
+        <p:spPr>
+          <a:xfrm>
+            <a:off x="1325880" y="1920240"/>
+            <a:ext cx="822960" cy="822960"/>
+          </a:xfrm>
+          <a:prstGeom prst="ellipse">
+            <a:avLst/>
+          </a:prstGeom>
+          <a:solidFill>
+            <a:srgbClr val="E3F2FD"/>
+          </a:solidFill>
+          <a:ln>
+            <a:noFill/>
+          </a:ln>
+        </p:spPr>
+        <p:style>
+          <a:lnRef idx="1">
+            <a:schemeClr val="accent1"/>
+          </a:lnRef>
+          <a:fillRef idx="3">
+            <a:schemeClr val="accent1"/>
+          </a:fillRef>
+          <a:effectRef idx="2">
+            <a:schemeClr val="accent1"/>
+          </a:effectRef>
+          <a:fontRef idx="minor">
+            <a:schemeClr val="lt1"/>
+          </a:fontRef>
+        </p:style>
+        <p:txBody>
+          <a:bodyPr rtlCol="0" anchor="ctr"/>
+          <a:lstStyle/>
+          <a:p>
+            <a:pPr algn="ctr"/>
+          </a:p>
+        </p:txBody>
+      </p:sp>
+      <p:sp>
+        <p:nvSpPr>
+          <p:cNvPr id="8" name="TextBox 7"/>
+          <p:cNvSpPr txBox="1"/>
+          <p:nvPr/>
+        </p:nvSpPr>
+        <p:spPr>
+          <a:xfrm>
+            <a:off x="1325880" y="2057400"/>
+            <a:ext cx="822960" cy="548640"/>
+          </a:xfrm>
+          <a:prstGeom prst="rect">
+            <a:avLst/>
+          </a:prstGeom>
+          <a:noFill/>
+        </p:spPr>
+        <p:txBody>
+          <a:bodyPr wrap="square">
+            <a:spAutoFit/>
+          </a:bodyPr>
+          <a:lstStyle/>
+          <a:p>
+            <a:pPr algn="ctr">
+              <a:defRPr sz="2200" b="1">
+                <a:solidFill>
+                  <a:srgbClr val="1976D2"/>
+                </a:solidFill>
+              </a:defRPr>
+            </a:pPr>
+            <a:r>
+              <a:t>01</a:t>
+            </a:r>
+          </a:p>
+        </p:txBody>
+      </p:sp>
+      <p:sp>
+        <p:nvSpPr>
+          <p:cNvPr id="9" name="TextBox 8"/>
+          <p:cNvSpPr txBox="1"/>
+          <p:nvPr/>
+        </p:nvSpPr>
+        <p:spPr>
+          <a:xfrm>
+            <a:off x="685800" y="3017520"/>
+            <a:ext cx="2103120" cy="365760"/>
+          </a:xfrm>
+          <a:prstGeom prst="rect">
+            <a:avLst/>
+          </a:prstGeom>
+          <a:noFill/>
+        </p:spPr>
+        <p:txBody>
+          <a:bodyPr wrap="square">
+            <a:spAutoFit/>
+          </a:bodyPr>
+          <a:lstStyle/>
+          <a:p>
+            <a:pPr algn="ctr">
+              <a:defRPr sz="1600" b="1">
+                <a:solidFill>
+                  <a:srgbClr val="212121"/>
+                </a:solidFill>
+              </a:defRPr>
+            </a:pPr>
+            <a:r>
+              <a:t>高效协同</a:t>
+            </a:r>
+          </a:p>
+        </p:txBody>
+      </p:sp>
+      <p:sp>
+        <p:nvSpPr>
+          <p:cNvPr id="10" name="Rectangle 9"/>
+          <p:cNvSpPr/>
+          <p:nvPr/>
+        </p:nvSpPr>
+        <p:spPr>
+          <a:xfrm>
+            <a:off x="1371600" y="3474720"/>
+            <a:ext cx="731520" cy="27432"/>
+          </a:xfrm>
+          <a:prstGeom prst="rect">
+            <a:avLst/>
+          </a:prstGeom>
+          <a:solidFill>
+            <a:srgbClr val="1976D2"/>
+          </a:solidFill>
+          <a:ln>
+            <a:noFill/>
+          </a:ln>
+        </p:spPr>
+        <p:style>
+          <a:lnRef idx="1">
+            <a:schemeClr val="accent1"/>
+          </a:lnRef>
+          <a:fillRef idx="3">
+            <a:schemeClr val="accent1"/>
+          </a:fillRef>
+          <a:effectRef idx="2">
+            <a:schemeClr val="accent1"/>
+          </a:effectRef>
+          <a:fontRef idx="minor">
+            <a:schemeClr val="lt1"/>
+          </a:fontRef>
+        </p:style>
+        <p:txBody>
+          <a:bodyPr rtlCol="0" anchor="ctr"/>
+          <a:lstStyle/>
+          <a:p>
+            <a:pPr algn="ctr"/>
+          </a:p>
+        </p:txBody>
+      </p:sp>
+      <p:sp>
+        <p:nvSpPr>
+          <p:cNvPr id="11" name="TextBox 10"/>
+          <p:cNvSpPr txBox="1"/>
+          <p:nvPr/>
+        </p:nvSpPr>
+        <p:spPr>
+          <a:xfrm>
+            <a:off x="731520" y="3657600"/>
+            <a:ext cx="2011680" cy="2011680"/>
+          </a:xfrm>
+          <a:prstGeom prst="rect">
+            <a:avLst/>
+          </a:prstGeom>
+          <a:noFill/>
+        </p:spPr>
+        <p:txBody>
+          <a:bodyPr wrap="square">
+            <a:spAutoFit/>
+          </a:bodyPr>
+          <a:lstStyle/>
+          <a:p>
+            <a:pPr algn="ctr">
+              <a:defRPr sz="1100" b="0">
+                <a:solidFill>
+                  <a:srgbClr val="616161"/>
+                </a:solidFill>
+              </a:defRPr>
+            </a:pPr>
+            <a:r>
+              <a:t>统一的主题与版式规范，跨团队协作时无需反复对齐视觉细节。</a:t>
+            </a:r>
+          </a:p>
+        </p:txBody>
+      </p:sp>
+      <p:sp>
+        <p:nvSpPr>
+          <p:cNvPr id="12" name="Rounded Rectangle 11"/>
+          <p:cNvSpPr/>
+          <p:nvPr/>
+        </p:nvSpPr>
+        <p:spPr>
+          <a:xfrm>
+            <a:off x="3383280" y="1463040"/>
+            <a:ext cx="2377440" cy="4389120"/>
+          </a:xfrm>
+          <a:prstGeom prst="roundRect">
+            <a:avLst/>
+          </a:prstGeom>
+          <a:solidFill>
+            <a:srgbClr val="FFFFFF"/>
+          </a:solidFill>
+          <a:ln w="12700">
+            <a:solidFill>
+              <a:srgbClr val="E0E0E0"/>
+            </a:solidFill>
+          </a:ln>
+        </p:spPr>
+        <p:style>
+          <a:lnRef idx="1">
+            <a:schemeClr val="accent1"/>
+          </a:lnRef>
+          <a:fillRef idx="3">
+            <a:schemeClr val="accent1"/>
+          </a:fillRef>
+          <a:effectRef idx="2">
+            <a:schemeClr val="accent1"/>
+          </a:effectRef>
+          <a:fontRef idx="minor">
+            <a:schemeClr val="lt1"/>
+          </a:fontRef>
+        </p:style>
+        <p:txBody>
+          <a:bodyPr rtlCol="0" anchor="ctr"/>
+          <a:lstStyle/>
+          <a:p>
+            <a:pPr algn="ctr"/>
+          </a:p>
+        </p:txBody>
+      </p:sp>
+      <p:sp>
+        <p:nvSpPr>
+          <p:cNvPr id="13" name="Rectangle 12"/>
+          <p:cNvSpPr/>
+          <p:nvPr/>
+        </p:nvSpPr>
+        <p:spPr>
+          <a:xfrm>
+            <a:off x="3383280" y="1463040"/>
+            <a:ext cx="2377440" cy="54864"/>
+          </a:xfrm>
+          <a:prstGeom prst="rect">
+            <a:avLst/>
+          </a:prstGeom>
+          <a:solidFill>
+            <a:srgbClr val="388E3C"/>
+          </a:solidFill>
+          <a:ln>
+            <a:noFill/>
+          </a:ln>
+        </p:spPr>
+        <p:style>
+          <a:lnRef idx="1">
+            <a:schemeClr val="accent1"/>
+          </a:lnRef>
+          <a:fillRef idx="3">
+            <a:schemeClr val="accent1"/>
+          </a:fillRef>
+          <a:effectRef idx="2">
+            <a:schemeClr val="accent1"/>
+          </a:effectRef>
+          <a:fontRef idx="minor">
+            <a:schemeClr val="lt1"/>
+          </a:fontRef>
+        </p:style>
+        <p:txBody>
+          <a:bodyPr rtlCol="0" anchor="ctr"/>
+          <a:lstStyle/>
+          <a:p>
+            <a:pPr algn="ctr"/>
+          </a:p>
+        </p:txBody>
+      </p:sp>
+      <p:sp>
+        <p:nvSpPr>
+          <p:cNvPr id="14" name="Oval 13"/>
+          <p:cNvSpPr/>
+          <p:nvPr/>
+        </p:nvSpPr>
+        <p:spPr>
+          <a:xfrm>
+            <a:off x="4160520" y="1920240"/>
+            <a:ext cx="822960" cy="822960"/>
+          </a:xfrm>
+          <a:prstGeom prst="ellipse">
+            <a:avLst/>
+          </a:prstGeom>
+          <a:solidFill>
+            <a:srgbClr val="E8F5E9"/>
+          </a:solidFill>
+          <a:ln>
+            <a:noFill/>
+          </a:ln>
+        </p:spPr>
+        <p:style>
+          <a:lnRef idx="1">
+            <a:schemeClr val="accent1"/>
+          </a:lnRef>
+          <a:fillRef idx="3">
+            <a:schemeClr val="accent1"/>
+          </a:fillRef>
+          <a:effectRef idx="2">
+            <a:schemeClr val="accent1"/>
+          </a:effectRef>
+          <a:fontRef idx="minor">
+            <a:schemeClr val="lt1"/>
+          </a:fontRef>
+        </p:style>
+        <p:txBody>
+          <a:bodyPr rtlCol="0" anchor="ctr"/>
+          <a:lstStyle/>
+          <a:p>
+            <a:pPr algn="ctr"/>
+          </a:p>
+        </p:txBody>
+      </p:sp>
+      <p:sp>
+        <p:nvSpPr>
+          <p:cNvPr id="15" name="TextBox 14"/>
+          <p:cNvSpPr txBox="1"/>
+          <p:nvPr/>
+        </p:nvSpPr>
+        <p:spPr>
+          <a:xfrm>
+            <a:off x="4160520" y="2057400"/>
+            <a:ext cx="822960" cy="548640"/>
+          </a:xfrm>
+          <a:prstGeom prst="rect">
+            <a:avLst/>
+          </a:prstGeom>
+          <a:noFill/>
+        </p:spPr>
+        <p:txBody>
+          <a:bodyPr wrap="square">
+            <a:spAutoFit/>
+          </a:bodyPr>
+          <a:lstStyle/>
+          <a:p>
+            <a:pPr algn="ctr">
+              <a:defRPr sz="2200" b="1">
+                <a:solidFill>
+                  <a:srgbClr val="388E3C"/>
+                </a:solidFill>
+              </a:defRPr>
+            </a:pPr>
+            <a:r>
+              <a:t>02</a:t>
+            </a:r>
+          </a:p>
+        </p:txBody>
+      </p:sp>
+      <p:sp>
+        <p:nvSpPr>
+          <p:cNvPr id="16" name="TextBox 15"/>
+          <p:cNvSpPr txBox="1"/>
+          <p:nvPr/>
+        </p:nvSpPr>
+        <p:spPr>
+          <a:xfrm>
+            <a:off x="3520440" y="3017520"/>
+            <a:ext cx="2103120" cy="365760"/>
+          </a:xfrm>
+          <a:prstGeom prst="rect">
+            <a:avLst/>
+          </a:prstGeom>
+          <a:noFill/>
+        </p:spPr>
+        <p:txBody>
+          <a:bodyPr wrap="square">
+            <a:spAutoFit/>
+          </a:bodyPr>
+          <a:lstStyle/>
+          <a:p>
+            <a:pPr algn="ctr">
+              <a:defRPr sz="1600" b="1">
+                <a:solidFill>
+                  <a:srgbClr val="212121"/>
+                </a:solidFill>
+              </a:defRPr>
+            </a:pPr>
+            <a:r>
+              <a:t>数据驱动</a:t>
+            </a:r>
+          </a:p>
+        </p:txBody>
+      </p:sp>
+      <p:sp>
+        <p:nvSpPr>
+          <p:cNvPr id="17" name="Rectangle 16"/>
+          <p:cNvSpPr/>
+          <p:nvPr/>
+        </p:nvSpPr>
+        <p:spPr>
+          <a:xfrm>
+            <a:off x="4206240" y="3474720"/>
+            <a:ext cx="731520" cy="27432"/>
+          </a:xfrm>
+          <a:prstGeom prst="rect">
+            <a:avLst/>
+          </a:prstGeom>
+          <a:solidFill>
+            <a:srgbClr val="388E3C"/>
+          </a:solidFill>
+          <a:ln>
+            <a:noFill/>
+          </a:ln>
+        </p:spPr>
+        <p:style>
+          <a:lnRef idx="1">
+            <a:schemeClr val="accent1"/>
+          </a:lnRef>
+          <a:fillRef idx="3">
+            <a:schemeClr val="accent1"/>
+          </a:fillRef>
+          <a:effectRef idx="2">
+            <a:schemeClr val="accent1"/>
+          </a:effectRef>
+          <a:fontRef idx="minor">
+            <a:schemeClr val="lt1"/>
+          </a:fontRef>
+        </p:style>
+        <p:txBody>
+          <a:bodyPr rtlCol="0" anchor="ctr"/>
+          <a:lstStyle/>
+          <a:p>
+            <a:pPr algn="ctr"/>
+          </a:p>
+        </p:txBody>
+      </p:sp>
+      <p:sp>
+        <p:nvSpPr>
+          <p:cNvPr id="18" name="TextBox 17"/>
+          <p:cNvSpPr txBox="1"/>
+          <p:nvPr/>
+        </p:nvSpPr>
+        <p:spPr>
+          <a:xfrm>
+            <a:off x="3566160" y="3657600"/>
+            <a:ext cx="2011680" cy="2011680"/>
+          </a:xfrm>
+          <a:prstGeom prst="rect">
+            <a:avLst/>
+          </a:prstGeom>
+          <a:noFill/>
+        </p:spPr>
+        <p:txBody>
+          <a:bodyPr wrap="square">
+            <a:spAutoFit/>
+          </a:bodyPr>
+          <a:lstStyle/>
+          <a:p>
+            <a:pPr algn="ctr">
+              <a:defRPr sz="1100" b="0">
+                <a:solidFill>
+                  <a:srgbClr val="616161"/>
+                </a:solidFill>
+              </a:defRPr>
+            </a:pPr>
+            <a:r>
+              <a:t>图表页由数据直接生成，数值变更后重新生成即可同步更新。</a:t>
+            </a:r>
+          </a:p>
+        </p:txBody>
+      </p:sp>
+      <p:sp>
+        <p:nvSpPr>
+          <p:cNvPr id="19" name="Rounded Rectangle 18"/>
+          <p:cNvSpPr/>
+          <p:nvPr/>
+        </p:nvSpPr>
+        <p:spPr>
+          <a:xfrm>
+            <a:off x="6217920" y="1463040"/>
+            <a:ext cx="2377440" cy="4389120"/>
+          </a:xfrm>
+          <a:prstGeom prst="roundRect">
+            <a:avLst/>
+          </a:prstGeom>
+          <a:solidFill>
+            <a:srgbClr val="FFFFFF"/>
+          </a:solidFill>
+          <a:ln w="12700">
+            <a:solidFill>
+              <a:srgbClr val="E0E0E0"/>
+            </a:solidFill>
+          </a:ln>
+        </p:spPr>
+        <p:style>
+          <a:lnRef idx="1">
+            <a:schemeClr val="accent1"/>
+          </a:lnRef>
+          <a:fillRef idx="3">
+            <a:schemeClr val="accent1"/>
+          </a:fillRef>
+          <a:effectRef idx="2">
+            <a:schemeClr val="accent1"/>
+          </a:effectRef>
+          <a:fontRef idx="minor">
+            <a:schemeClr val="lt1"/>
+          </a:fontRef>
+        </p:style>
+        <p:txBody>
+          <a:bodyPr rtlCol="0" anchor="ctr"/>
+          <a:lstStyle/>
+          <a:p>
+            <a:pPr algn="ctr"/>
+          </a:p>
+        </p:txBody>
+      </p:sp>
+      <p:sp>
+        <p:nvSpPr>
+          <p:cNvPr id="20" name="Rectangle 19"/>
+          <p:cNvSpPr/>
+          <p:nvPr/>
+        </p:nvSpPr>
+        <p:spPr>
+          <a:xfrm>
+            <a:off x="6217920" y="1463040"/>
+            <a:ext cx="2377440" cy="54864"/>
+          </a:xfrm>
+          <a:prstGeom prst="rect">
+            <a:avLst/>
+          </a:prstGeom>
+          <a:solidFill>
+            <a:srgbClr val="F57C00"/>
+          </a:solidFill>
+          <a:ln>
+            <a:noFill/>
+          </a:ln>
+        </p:spPr>
+        <p:style>
+          <a:lnRef idx="1">
+            <a:schemeClr val="accent1"/>
+          </a:lnRef>
+          <a:fillRef idx="3">
+            <a:schemeClr val="accent1"/>
+          </a:fillRef>
+          <a:effectRef idx="2">
+            <a:schemeClr val="accent1"/>
+          </a:effectRef>
+          <a:fontRef idx="minor">
+            <a:schemeClr val="lt1"/>
+          </a:fontRef>
+        </p:style>
+        <p:txBody>
+          <a:bodyPr rtlCol="0" anchor="ctr"/>
+          <a:lstStyle/>
+          <a:p>
+            <a:pPr algn="ctr"/>
+          </a:p>
+        </p:txBody>
+      </p:sp>
+      <p:sp>
+        <p:nvSpPr>
+          <p:cNvPr id="21" name="Oval 20"/>
+          <p:cNvSpPr/>
+          <p:nvPr/>
+        </p:nvSpPr>
+        <p:spPr>
+          <a:xfrm>
+            <a:off x="6995160" y="1920240"/>
+            <a:ext cx="822960" cy="822960"/>
+          </a:xfrm>
+          <a:prstGeom prst="ellipse">
+            <a:avLst/>
+          </a:prstGeom>
+          <a:solidFill>
+            <a:srgbClr val="FFF3E0"/>
+          </a:solidFill>
+          <a:ln>
+            <a:noFill/>
+          </a:ln>
+        </p:spPr>
+        <p:style>
+          <a:lnRef idx="1">
+            <a:schemeClr val="accent1"/>
+          </a:lnRef>
+          <a:fillRef idx="3">
+            <a:schemeClr val="accent1"/>
+          </a:fillRef>
+          <a:effectRef idx="2">
+            <a:schemeClr val="accent1"/>
+          </a:effectRef>
+          <a:fontRef idx="minor">
+            <a:schemeClr val="lt1"/>
+          </a:fontRef>
+        </p:style>
+        <p:txBody>
+          <a:bodyPr rtlCol="0" anchor="ctr"/>
+          <a:lstStyle/>
+          <a:p>
+            <a:pPr algn="ctr"/>
+          </a:p>
+        </p:txBody>
+      </p:sp>
+      <p:sp>
+        <p:nvSpPr>
+          <p:cNvPr id="22" name="TextBox 21"/>
+          <p:cNvSpPr txBox="1"/>
+          <p:nvPr/>
+        </p:nvSpPr>
+        <p:spPr>
+          <a:xfrm>
+            <a:off x="6995160" y="2057400"/>
+            <a:ext cx="822960" cy="548640"/>
+          </a:xfrm>
+          <a:prstGeom prst="rect">
+            <a:avLst/>
+          </a:prstGeom>
+          <a:noFill/>
+        </p:spPr>
+        <p:txBody>
+          <a:bodyPr wrap="square">
+            <a:spAutoFit/>
+          </a:bodyPr>
+          <a:lstStyle/>
+          <a:p>
+            <a:pPr algn="ctr">
+              <a:defRPr sz="2200" b="1">
+                <a:solidFill>
+                  <a:srgbClr val="F57C00"/>
+                </a:solidFill>
+              </a:defRPr>
+            </a:pPr>
+            <a:r>
+              <a:t>03</a:t>
+            </a:r>
+          </a:p>
+        </p:txBody>
+      </p:sp>
+      <p:sp>
+        <p:nvSpPr>
+          <p:cNvPr id="23" name="TextBox 22"/>
+          <p:cNvSpPr txBox="1"/>
+          <p:nvPr/>
+        </p:nvSpPr>
+        <p:spPr>
+          <a:xfrm>
+            <a:off x="6355080" y="3017520"/>
+            <a:ext cx="2103120" cy="365760"/>
+          </a:xfrm>
+          <a:prstGeom prst="rect">
+            <a:avLst/>
+          </a:prstGeom>
+          <a:noFill/>
+        </p:spPr>
+        <p:txBody>
+          <a:bodyPr wrap="square">
+            <a:spAutoFit/>
+          </a:bodyPr>
+          <a:lstStyle/>
+          <a:p>
+            <a:pPr algn="ctr">
+              <a:defRPr sz="1600" b="1">
+                <a:solidFill>
+                  <a:srgbClr val="212121"/>
+                </a:solidFill>
+              </a:defRPr>
+            </a:pPr>
+            <a:r>
+              <a:t>持续演进</a:t>
+            </a:r>
+          </a:p>
+        </p:txBody>
+      </p:sp>
+      <p:sp>
+        <p:nvSpPr>
+          <p:cNvPr id="24" name="Rectangle 23"/>
+          <p:cNvSpPr/>
+          <p:nvPr/>
+        </p:nvSpPr>
+        <p:spPr>
+          <a:xfrm>
+            <a:off x="7040880" y="3474720"/>
+            <a:ext cx="731520" cy="27432"/>
+          </a:xfrm>
+          <a:prstGeom prst="rect">
+            <a:avLst/>
+          </a:prstGeom>
+          <a:solidFill>
+            <a:srgbClr val="F57C00"/>
+          </a:solidFill>
+          <a:ln>
+            <a:noFill/>
+          </a:ln>
+        </p:spPr>
+        <p:style>
+          <a:lnRef idx="1">
+            <a:schemeClr val="accent1"/>
+          </a:lnRef>
+          <a:fillRef idx="3">
+            <a:schemeClr val="accent1"/>
+          </a:fillRef>
+          <a:effectRef idx="2">
+            <a:schemeClr val="accent1"/>
+          </a:effectRef>
+          <a:fontRef idx="minor">
+            <a:schemeClr val="lt1"/>
+          </a:fontRef>
+        </p:style>
+        <p:txBody>
+          <a:bodyPr rtlCol="0" anchor="ctr"/>
+          <a:lstStyle/>
+          <a:p>
+            <a:pPr algn="ctr"/>
+          </a:p>
+        </p:txBody>
+      </p:sp>
+      <p:sp>
+        <p:nvSpPr>
+          <p:cNvPr id="25" name="TextBox 24"/>
+          <p:cNvSpPr txBox="1"/>
+          <p:nvPr/>
+        </p:nvSpPr>
+        <p:spPr>
+          <a:xfrm>
+            <a:off x="6400800" y="3657600"/>
+            <a:ext cx="2011680" cy="2011680"/>
+          </a:xfrm>
+          <a:prstGeom prst="rect">
+            <a:avLst/>
+          </a:prstGeom>
+          <a:noFill/>
+        </p:spPr>
+        <p:txBody>
+          <a:bodyPr wrap="square">
+            <a:spAutoFit/>
+          </a:bodyPr>
+          <a:lstStyle/>
+          <a:p>
+            <a:pPr algn="ctr">
+              <a:defRPr sz="1100" b="0">
+                <a:solidFill>
+                  <a:srgbClr val="616161"/>
+                </a:solidFill>
+              </a:defRPr>
+            </a:pPr>
+            <a:r>
+              <a:t>新增生成器只需登记进注册表，批量脚本与目录结构自动适配。</a:t>
+            </a:r>
           </a:p>
         </p:txBody>
       </p:sp>

--- a/templates/static/content/three_column_red_business.pptx
+++ b/templates/static/content/three_column_red_business.pptx
@@ -3181,7 +3181,7 @@
             <a:avLst/>
           </a:prstGeom>
           <a:solidFill>
-            <a:srgbClr val="1976D2"/>
+            <a:srgbClr val="C0392B"/>
           </a:solidFill>
           <a:ln>
             <a:noFill/>
@@ -3269,7 +3269,7 @@
             <a:avLst/>
           </a:prstGeom>
           <a:solidFill>
-            <a:srgbClr val="1976D2"/>
+            <a:srgbClr val="C0392B"/>
           </a:solidFill>
           <a:ln>
             <a:noFill/>
@@ -3365,7 +3365,7 @@
             <a:pPr algn="ctr">
               <a:defRPr sz="2200" b="1">
                 <a:solidFill>
-                  <a:srgbClr val="1976D2"/>
+                  <a:srgbClr val="C0392B"/>
                 </a:solidFill>
               </a:defRPr>
             </a:pPr>
@@ -3425,7 +3425,7 @@
             <a:avLst/>
           </a:prstGeom>
           <a:solidFill>
-            <a:srgbClr val="1976D2"/>
+            <a:srgbClr val="C0392B"/>
           </a:solidFill>
           <a:ln>
             <a:noFill/>
@@ -3548,7 +3548,7 @@
             <a:avLst/>
           </a:prstGeom>
           <a:solidFill>
-            <a:srgbClr val="388E3C"/>
+            <a:srgbClr val="E74C3C"/>
           </a:solidFill>
           <a:ln>
             <a:noFill/>
@@ -3644,7 +3644,7 @@
             <a:pPr algn="ctr">
               <a:defRPr sz="2200" b="1">
                 <a:solidFill>
-                  <a:srgbClr val="388E3C"/>
+                  <a:srgbClr val="E74C3C"/>
                 </a:solidFill>
               </a:defRPr>
             </a:pPr>
@@ -3704,7 +3704,7 @@
             <a:avLst/>
           </a:prstGeom>
           <a:solidFill>
-            <a:srgbClr val="388E3C"/>
+            <a:srgbClr val="E74C3C"/>
           </a:solidFill>
           <a:ln>
             <a:noFill/>
@@ -3827,7 +3827,7 @@
             <a:avLst/>
           </a:prstGeom>
           <a:solidFill>
-            <a:srgbClr val="F57C00"/>
+            <a:srgbClr val="FF6B6B"/>
           </a:solidFill>
           <a:ln>
             <a:noFill/>
@@ -3923,7 +3923,7 @@
             <a:pPr algn="ctr">
               <a:defRPr sz="2200" b="1">
                 <a:solidFill>
-                  <a:srgbClr val="F57C00"/>
+                  <a:srgbClr val="FF6B6B"/>
                 </a:solidFill>
               </a:defRPr>
             </a:pPr>
@@ -3983,7 +3983,7 @@
             <a:avLst/>
           </a:prstGeom>
           <a:solidFill>
-            <a:srgbClr val="F57C00"/>
+            <a:srgbClr val="FF6B6B"/>
           </a:solidFill>
           <a:ln>
             <a:noFill/>
